--- a/Battle_Tanks_Presentation.pptx
+++ b/Battle_Tanks_Presentation.pptx
@@ -2452,7 +2452,7 @@
                 <a:ea typeface="Arial" pitchFamily="34" charset="-122"/>
                 <a:cs typeface="Arial" pitchFamily="34" charset="-120"/>
               </a:rPr>
-              <a:t>PC · Decode · RegFile</a:t>
+              <a:t>Decode · RegFile</a:t>
             </a:r>
             <a:endParaRPr lang="en-US" sz="1300" dirty="0"/>
           </a:p>
@@ -2580,7 +2580,7 @@
                 <a:ea typeface="Arial" pitchFamily="34" charset="-122"/>
                 <a:cs typeface="Arial" pitchFamily="34" charset="-120"/>
               </a:rPr>
-              <a:t>Load/Store · Write-back</a:t>
+              <a:t>Load/Store · Result</a:t>
             </a:r>
             <a:endParaRPr lang="en-US" sz="1300" dirty="0"/>
           </a:p>
@@ -2691,7 +2691,7 @@
               <a:buNone/>
             </a:pPr>
             <a:r>
-              <a:rPr lang="en-US" sz="1200" b="1" dirty="0">
+              <a:rPr lang="en-US" sz="1300" b="1" dirty="0">
                 <a:solidFill>
                   <a:srgbClr val="C0392B"/>
                 </a:solidFill>
@@ -2699,9 +2699,9 @@
                 <a:ea typeface="Arial" pitchFamily="34" charset="-122"/>
                 <a:cs typeface="Arial" pitchFamily="34" charset="-120"/>
               </a:rPr>
-              <a:t>NEW  RV32M: MUL · DIV/REM</a:t>
-            </a:r>
-            <a:endParaRPr lang="en-US" sz="1200" dirty="0"/>
+              <a:t>NEW: RV32M unit</a:t>
+            </a:r>
+            <a:endParaRPr lang="en-US" sz="1300" dirty="0"/>
           </a:p>
         </p:txBody>
       </p:sp>
@@ -4441,7 +4441,7 @@
                 <a:ea typeface="Arial" pitchFamily="34" charset="-122"/>
                 <a:cs typeface="Arial" pitchFamily="34" charset="-120"/>
               </a:rPr>
-              <a:t>Timing Diagram: 28 cycles, real instruction sequence</a:t>
+              <a:t>Timing Diagram: 28 cycles, instruction sequence</a:t>
             </a:r>
             <a:endParaRPr lang="en-US" sz="3000" dirty="0"/>
           </a:p>
